--- a/Zadanie_3/Canny detector hrán.pptx
+++ b/Zadanie_3/Canny detector hrán.pptx
@@ -17,9 +17,10 @@
     <p:sldId id="261" r:id="rId11"/>
     <p:sldId id="268" r:id="rId12"/>
     <p:sldId id="262" r:id="rId13"/>
-    <p:sldId id="263" r:id="rId14"/>
-    <p:sldId id="270" r:id="rId15"/>
-    <p:sldId id="269" r:id="rId16"/>
+    <p:sldId id="270" r:id="rId14"/>
+    <p:sldId id="269" r:id="rId15"/>
+    <p:sldId id="271" r:id="rId16"/>
+    <p:sldId id="272" r:id="rId17"/>
   </p:sldIdLst>
   <p:sldSz cx="12192000" cy="6858000"/>
   <p:notesSz cx="6858000" cy="9144000"/>
@@ -275,7 +276,7 @@
             <a:fld id="{2CE01CF4-796C-4004-AF3A-A3241E1689A3}" type="datetime1">
               <a:rPr lang="sk-SK"/>
               <a:pPr lvl="0"/>
-              <a:t>6. 4. 2026</a:t>
+              <a:t>7. 4. 2026</a:t>
             </a:fld>
             <a:endParaRPr lang="sk-SK"/>
           </a:p>
@@ -645,6 +646,9 @@
   <p:clrMapOvr>
     <a:masterClrMapping/>
   </p:clrMapOvr>
+  <p:transition spd="med">
+    <p:pull/>
+  </p:transition>
   <p:hf sldNum="0" hdr="0" ftr="0" dt="0"/>
 </p:sldLayout>
 </file>
@@ -808,7 +812,7 @@
             <a:fld id="{BD00EC2F-3405-4557-ACDB-5142CA4C3EC4}" type="datetime1">
               <a:rPr lang="sk-SK"/>
               <a:pPr lvl="0"/>
-              <a:t>6. 4. 2026</a:t>
+              <a:t>7. 4. 2026</a:t>
             </a:fld>
             <a:endParaRPr lang="sk-SK"/>
           </a:p>
@@ -887,6 +891,9 @@
   <p:clrMapOvr>
     <a:masterClrMapping/>
   </p:clrMapOvr>
+  <p:transition spd="med">
+    <p:pull/>
+  </p:transition>
 </p:sldLayout>
 </file>
 
@@ -1054,7 +1061,7 @@
             <a:fld id="{0511035A-3827-4EB0-B07C-54483A230FC4}" type="datetime1">
               <a:rPr lang="sk-SK"/>
               <a:pPr lvl="0"/>
-              <a:t>6. 4. 2026</a:t>
+              <a:t>7. 4. 2026</a:t>
             </a:fld>
             <a:endParaRPr lang="sk-SK"/>
           </a:p>
@@ -1133,6 +1140,9 @@
   <p:clrMapOvr>
     <a:masterClrMapping/>
   </p:clrMapOvr>
+  <p:transition spd="med">
+    <p:pull/>
+  </p:transition>
 </p:sldLayout>
 </file>
 
@@ -1290,7 +1300,7 @@
             <a:fld id="{3A965714-0C75-4AE1-BC0C-2CC85DA8F817}" type="datetime1">
               <a:rPr lang="sk-SK"/>
               <a:pPr lvl="0"/>
-              <a:t>6. 4. 2026</a:t>
+              <a:t>7. 4. 2026</a:t>
             </a:fld>
             <a:endParaRPr lang="sk-SK"/>
           </a:p>
@@ -1369,6 +1379,9 @@
   <p:clrMapOvr>
     <a:masterClrMapping/>
   </p:clrMapOvr>
+  <p:transition spd="med">
+    <p:pull/>
+  </p:transition>
   <p:hf sldNum="0" hdr="0" ftr="0" dt="0"/>
 </p:sldLayout>
 </file>
@@ -1531,7 +1544,7 @@
             <a:fld id="{8CF7E90D-9ED4-48BB-BC2A-5D4254CF533F}" type="datetime1">
               <a:rPr lang="sk-SK"/>
               <a:pPr lvl="0"/>
-              <a:t>6. 4. 2026</a:t>
+              <a:t>7. 4. 2026</a:t>
             </a:fld>
             <a:endParaRPr lang="sk-SK"/>
           </a:p>
@@ -1756,6 +1769,9 @@
   <p:clrMapOvr>
     <a:masterClrMapping/>
   </p:clrMapOvr>
+  <p:transition spd="med">
+    <p:pull/>
+  </p:transition>
 </p:sldLayout>
 </file>
 
@@ -1997,7 +2013,7 @@
             <a:fld id="{F413FD96-B2FD-4F7E-A6B2-850F1CFEA391}" type="datetime1">
               <a:rPr lang="sk-SK"/>
               <a:pPr lvl="0"/>
-              <a:t>6. 4. 2026</a:t>
+              <a:t>7. 4. 2026</a:t>
             </a:fld>
             <a:endParaRPr lang="sk-SK"/>
           </a:p>
@@ -2076,6 +2092,9 @@
   <p:clrMapOvr>
     <a:masterClrMapping/>
   </p:clrMapOvr>
+  <p:transition spd="med">
+    <p:pull/>
+  </p:transition>
 </p:sldLayout>
 </file>
 
@@ -2417,7 +2436,7 @@
             <a:fld id="{1D0A8508-A56D-4659-B51D-B4A5488486F8}" type="datetime1">
               <a:rPr lang="sk-SK"/>
               <a:pPr lvl="0"/>
-              <a:t>6. 4. 2026</a:t>
+              <a:t>7. 4. 2026</a:t>
             </a:fld>
             <a:endParaRPr lang="sk-SK"/>
           </a:p>
@@ -2496,6 +2515,9 @@
   <p:clrMapOvr>
     <a:masterClrMapping/>
   </p:clrMapOvr>
+  <p:transition spd="med">
+    <p:pull/>
+  </p:transition>
 </p:sldLayout>
 </file>
 
@@ -2579,7 +2601,7 @@
             <a:fld id="{FD9B3DB9-EA55-41F8-91F0-3DF9CA493D47}" type="datetime1">
               <a:rPr lang="sk-SK"/>
               <a:pPr lvl="0"/>
-              <a:t>6. 4. 2026</a:t>
+              <a:t>7. 4. 2026</a:t>
             </a:fld>
             <a:endParaRPr lang="sk-SK"/>
           </a:p>
@@ -2658,6 +2680,9 @@
   <p:clrMapOvr>
     <a:masterClrMapping/>
   </p:clrMapOvr>
+  <p:transition spd="med">
+    <p:pull/>
+  </p:transition>
 </p:sldLayout>
 </file>
 
@@ -2707,7 +2732,7 @@
             <a:fld id="{EAD363C8-6DCC-4587-BB28-8CBC52368D84}" type="datetime1">
               <a:rPr lang="sk-SK"/>
               <a:pPr lvl="0"/>
-              <a:t>6. 4. 2026</a:t>
+              <a:t>7. 4. 2026</a:t>
             </a:fld>
             <a:endParaRPr lang="sk-SK"/>
           </a:p>
@@ -2786,6 +2811,9 @@
   <p:clrMapOvr>
     <a:masterClrMapping/>
   </p:clrMapOvr>
+  <p:transition spd="med">
+    <p:pull/>
+  </p:transition>
 </p:sldLayout>
 </file>
 
@@ -3074,7 +3102,7 @@
             <a:fld id="{899BAE5B-9D9B-420D-AB69-24742A71448F}" type="datetime1">
               <a:rPr lang="sk-SK"/>
               <a:pPr lvl="0"/>
-              <a:t>6. 4. 2026</a:t>
+              <a:t>7. 4. 2026</a:t>
             </a:fld>
             <a:endParaRPr lang="sk-SK"/>
           </a:p>
@@ -3226,6 +3254,9 @@
   <p:clrMapOvr>
     <a:masterClrMapping/>
   </p:clrMapOvr>
+  <p:transition spd="med">
+    <p:pull/>
+  </p:transition>
 </p:sldLayout>
 </file>
 
@@ -3473,7 +3504,7 @@
             <a:fld id="{DD191E8B-02D5-4926-B66E-FD4361104C9F}" type="datetime1">
               <a:rPr lang="sk-SK"/>
               <a:pPr lvl="0"/>
-              <a:t>6. 4. 2026</a:t>
+              <a:t>7. 4. 2026</a:t>
             </a:fld>
             <a:endParaRPr lang="sk-SK"/>
           </a:p>
@@ -3625,6 +3656,9 @@
   <p:clrMapOvr>
     <a:masterClrMapping/>
   </p:clrMapOvr>
+  <p:transition spd="med">
+    <p:pull/>
+  </p:transition>
 </p:sldLayout>
 </file>
 
@@ -3829,7 +3863,7 @@
             <a:fld id="{57F055B4-7D12-46DD-AEEA-11DB8D18C158}" type="datetime1">
               <a:rPr lang="sk-SK"/>
               <a:pPr lvl="0"/>
-              <a:t>6. 4. 2026</a:t>
+              <a:t>7. 4. 2026</a:t>
             </a:fld>
             <a:endParaRPr lang="sk-SK"/>
           </a:p>
@@ -4039,6 +4073,9 @@
     <p:sldLayoutId id="2147483658" r:id="rId10"/>
     <p:sldLayoutId id="2147483659" r:id="rId11"/>
   </p:sldLayoutIdLst>
+  <p:transition spd="med">
+    <p:pull/>
+  </p:transition>
   <p:txStyles>
     <p:titleStyle>
       <a:lvl1pPr marL="0" marR="0" lvl="0" indent="0" algn="l" defTabSz="914400" rtl="0" fontAlgn="auto" hangingPunct="1">
@@ -4432,6 +4469,9 @@
   <p:clrMapOvr>
     <a:masterClrMapping/>
   </p:clrMapOvr>
+  <p:transition spd="med">
+    <p:pull/>
+  </p:transition>
 </p:sld>
 </file>
 
@@ -4475,8 +4515,23 @@
           <a:p>
             <a:pPr lvl="0"/>
             <a:r>
-              <a:rPr lang="sk-SK"/>
-              <a:t>Dvojité prahovanie (Double Tresholding)</a:t>
+              <a:rPr lang="sk-SK" dirty="0"/>
+              <a:t>Dvojité </a:t>
+            </a:r>
+            <a:r>
+              <a:rPr lang="sk-SK" dirty="0" err="1"/>
+              <a:t>prahovanie</a:t>
+            </a:r>
+            <a:r>
+              <a:rPr lang="sk-SK" dirty="0"/>
+              <a:t> = </a:t>
+            </a:r>
+            <a:br>
+              <a:rPr lang="sk-SK" dirty="0"/>
+            </a:br>
+            <a:r>
+              <a:rPr lang="sk-SK" dirty="0"/>
+              <a:t>                            DOUBLE THRESHOLD</a:t>
             </a:r>
           </a:p>
         </p:txBody>
@@ -4502,46 +4557,110 @@
           <a:bodyPr/>
           <a:lstStyle/>
           <a:p>
-            <a:pPr lvl="0"/>
-            <a:r>
-              <a:rPr lang="sk-SK"/>
-              <a:t>Cieľ: Rozdelenie pixelov do troch kategórií podľa ich intenzity.</a:t>
-            </a:r>
-          </a:p>
-          <a:p>
-            <a:pPr lvl="0"/>
-            <a:r>
-              <a:rPr lang="sk-SK"/>
-              <a:t>Silné pixely: Hodnota ≥ High Treshold (255) – Isté hrany.</a:t>
-            </a:r>
-          </a:p>
-          <a:p>
-            <a:pPr lvl="0"/>
-            <a:r>
-              <a:rPr lang="sk-SK"/>
-              <a:t>Slabé pixely: Low (75) ≤ Hodnota ≥ High</a:t>
-            </a:r>
-            <a:r>
-              <a:rPr lang="en-US"/>
+            <a:pPr lvl="0">
+              <a:lnSpc>
+                <a:spcPct val="150000"/>
+              </a:lnSpc>
+            </a:pPr>
+            <a:r>
+              <a:rPr lang="sk-SK" dirty="0"/>
+              <a:t>Rozdelenie pixelov do troch kategórií podľa ich intenzity</a:t>
+            </a:r>
+          </a:p>
+          <a:p>
+            <a:pPr lvl="0">
+              <a:lnSpc>
+                <a:spcPct val="150000"/>
+              </a:lnSpc>
+            </a:pPr>
+            <a:r>
+              <a:rPr lang="sk-SK" dirty="0"/>
+              <a:t>Silné pixely: Hodnota ≥ </a:t>
+            </a:r>
+            <a:r>
+              <a:rPr lang="sk-SK" dirty="0" err="1"/>
+              <a:t>High</a:t>
+            </a:r>
+            <a:r>
+              <a:rPr lang="sk-SK" dirty="0"/>
+              <a:t> </a:t>
+            </a:r>
+            <a:r>
+              <a:rPr lang="sk-SK" dirty="0" err="1"/>
+              <a:t>Treshold</a:t>
+            </a:r>
+            <a:r>
+              <a:rPr lang="sk-SK" dirty="0"/>
+              <a:t> (255) – Isté hrany</a:t>
+            </a:r>
+          </a:p>
+          <a:p>
+            <a:pPr lvl="0">
+              <a:lnSpc>
+                <a:spcPct val="150000"/>
+              </a:lnSpc>
+            </a:pPr>
+            <a:r>
+              <a:rPr lang="sk-SK" dirty="0"/>
+              <a:t>Slabé pixely: </a:t>
+            </a:r>
+            <a:r>
+              <a:rPr lang="sk-SK" dirty="0" err="1"/>
+              <a:t>Low</a:t>
+            </a:r>
+            <a:r>
+              <a:rPr lang="sk-SK" dirty="0"/>
+              <a:t> (75) ≤ Hodnota ≥ </a:t>
+            </a:r>
+            <a:r>
+              <a:rPr lang="sk-SK" dirty="0" err="1"/>
+              <a:t>High</a:t>
+            </a:r>
+            <a:r>
+              <a:rPr lang="en-US" dirty="0"/>
               <a:t> (255)</a:t>
             </a:r>
             <a:r>
-              <a:rPr lang="sk-SK"/>
+              <a:rPr lang="sk-SK" dirty="0"/>
               <a:t> – Potenciálne hrany</a:t>
             </a:r>
           </a:p>
           <a:p>
-            <a:pPr lvl="0"/>
-            <a:r>
-              <a:rPr lang="sk-SK"/>
-              <a:t>Irelevantné pixely: Hodnota ≤ Low Treshold (75) – Nastavené na 0</a:t>
-            </a:r>
-          </a:p>
-          <a:p>
-            <a:pPr lvl="0"/>
-            <a:r>
-              <a:rPr lang="sk-SK"/>
-              <a:t>Tento krok odfiltruje slabý šum, ale ponechá slabé pixely pre finálne rozhodnutie.</a:t>
+            <a:pPr lvl="0">
+              <a:lnSpc>
+                <a:spcPct val="150000"/>
+              </a:lnSpc>
+            </a:pPr>
+            <a:r>
+              <a:rPr lang="sk-SK" dirty="0"/>
+              <a:t>Irelevantné pixely: Hodnota ≤ </a:t>
+            </a:r>
+            <a:r>
+              <a:rPr lang="sk-SK" dirty="0" err="1"/>
+              <a:t>Low</a:t>
+            </a:r>
+            <a:r>
+              <a:rPr lang="sk-SK" dirty="0"/>
+              <a:t> </a:t>
+            </a:r>
+            <a:r>
+              <a:rPr lang="sk-SK" dirty="0" err="1"/>
+              <a:t>Treshold</a:t>
+            </a:r>
+            <a:r>
+              <a:rPr lang="sk-SK" dirty="0"/>
+              <a:t> (75) – Nastavené na 0</a:t>
+            </a:r>
+          </a:p>
+          <a:p>
+            <a:pPr lvl="0">
+              <a:lnSpc>
+                <a:spcPct val="150000"/>
+              </a:lnSpc>
+            </a:pPr>
+            <a:r>
+              <a:rPr lang="sk-SK" dirty="0"/>
+              <a:t>Tento krok odfiltruje slabý šum, ale ponechá slabé pixely</a:t>
             </a:r>
           </a:p>
         </p:txBody>
@@ -4551,6 +4670,9 @@
   <p:clrMapOvr>
     <a:masterClrMapping/>
   </p:clrMapOvr>
+  <p:transition spd="med">
+    <p:pull/>
+  </p:transition>
 </p:sld>
 </file>
 
@@ -4606,6 +4728,9 @@
   <p:clrMapOvr>
     <a:masterClrMapping/>
   </p:clrMapOvr>
+  <p:transition spd="med">
+    <p:pull/>
+  </p:transition>
 </p:sld>
 </file>
 
@@ -4642,16 +4767,22 @@
             <p:ph type="title"/>
           </p:nvPr>
         </p:nvSpPr>
-        <p:spPr/>
+        <p:spPr>
+          <a:xfrm>
+            <a:off x="1371600" y="990597"/>
+            <a:ext cx="9601200" cy="838200"/>
+          </a:xfrm>
+        </p:spPr>
         <p:txBody>
           <a:bodyPr/>
           <a:lstStyle/>
           <a:p>
             <a:pPr lvl="0"/>
             <a:r>
-              <a:rPr lang="sk-SK"/>
+              <a:rPr lang="sk-SK" dirty="0" err="1"/>
               <a:t>Hysterézia</a:t>
             </a:r>
+            <a:endParaRPr lang="sk-SK" dirty="0"/>
           </a:p>
         </p:txBody>
       </p:sp>
@@ -4678,34 +4809,45 @@
           <a:p>
             <a:pPr lvl="0">
               <a:lnSpc>
-                <a:spcPct val="60000"/>
+                <a:spcPct val="150000"/>
               </a:lnSpc>
             </a:pPr>
             <a:r>
-              <a:rPr lang="sk-SK" sz="2400"/>
-              <a:t>Cieľ: Rozhodnutie o osude slabých pixelov</a:t>
+              <a:rPr lang="sk-SK" sz="2400" dirty="0"/>
+              <a:t>Rozhodnutie o slabých pixelov</a:t>
             </a:r>
           </a:p>
           <a:p>
             <a:pPr lvl="0">
               <a:lnSpc>
-                <a:spcPct val="60000"/>
+                <a:spcPct val="150000"/>
               </a:lnSpc>
             </a:pPr>
             <a:r>
-              <a:rPr lang="sk-SK" sz="2400"/>
-              <a:t>Algoritmus kontroly okolia: Prechádzame všetkých 8 susedov slabého pixelu (okolí 3 x 3).</a:t>
+              <a:rPr lang="sk-SK" sz="2400" dirty="0"/>
+              <a:t>Algoritmus kontroly okolia:</a:t>
+            </a:r>
+          </a:p>
+          <a:p>
+            <a:pPr lvl="1">
+              <a:lnSpc>
+                <a:spcPct val="150000"/>
+              </a:lnSpc>
+            </a:pPr>
+            <a:r>
+              <a:rPr lang="sk-SK" sz="2400" dirty="0"/>
+              <a:t>Prechádzame všetkých 8 susedov slabého pixelu -&gt; 3 x 3</a:t>
             </a:r>
           </a:p>
           <a:p>
             <a:pPr lvl="0">
               <a:lnSpc>
-                <a:spcPct val="60000"/>
+                <a:spcPct val="150000"/>
               </a:lnSpc>
             </a:pPr>
             <a:r>
-              <a:rPr lang="sk-SK" sz="2400"/>
-              <a:t>Slabý pixel prežije a stane sa silným (255) len vtedy, ak je prepojený s aspoň jedným silným pixelom.</a:t>
+              <a:rPr lang="sk-SK" sz="2400" dirty="0"/>
+              <a:t>Slabý pixel bude ponechaný a stane sa silným (255), ak je prepojený s aspoň jedným silným pixelom</a:t>
             </a:r>
           </a:p>
         </p:txBody>
@@ -4715,111 +4857,13 @@
   <p:clrMapOvr>
     <a:masterClrMapping/>
   </p:clrMapOvr>
+  <p:transition spd="med">
+    <p:pull/>
+  </p:transition>
 </p:sld>
 </file>
 
 <file path=ppt/slides/slide13.xml><?xml version="1.0" encoding="utf-8"?>
-<p:sld xmlns:a="http://schemas.openxmlformats.org/drawingml/2006/main" xmlns:r="http://schemas.openxmlformats.org/officeDocument/2006/relationships" xmlns:p="http://schemas.openxmlformats.org/presentationml/2006/main">
-  <p:cSld name="Slide8">
-    <p:spTree>
-      <p:nvGrpSpPr>
-        <p:cNvPr id="1" name=""/>
-        <p:cNvGrpSpPr/>
-        <p:nvPr/>
-      </p:nvGrpSpPr>
-      <p:grpSpPr>
-        <a:xfrm>
-          <a:off x="0" y="0"/>
-          <a:ext cx="0" cy="0"/>
-          <a:chOff x="0" y="0"/>
-          <a:chExt cx="0" cy="0"/>
-        </a:xfrm>
-      </p:grpSpPr>
-      <p:sp>
-        <p:nvSpPr>
-          <p:cNvPr id="2" name="Nadpis 1">
-            <a:extLst>
-              <a:ext uri="{FF2B5EF4-FFF2-40B4-BE49-F238E27FC236}">
-                <a16:creationId xmlns:a16="http://schemas.microsoft.com/office/drawing/2014/main" id="{EF422761-733E-F699-6F1B-841A9042E9C5}"/>
-              </a:ext>
-            </a:extLst>
-          </p:cNvPr>
-          <p:cNvSpPr txBox="1">
-            <a:spLocks noGrp="1"/>
-          </p:cNvSpPr>
-          <p:nvPr>
-            <p:ph type="title"/>
-          </p:nvPr>
-        </p:nvSpPr>
-        <p:spPr/>
-        <p:txBody>
-          <a:bodyPr/>
-          <a:lstStyle/>
-          <a:p>
-            <a:pPr lvl="0"/>
-            <a:r>
-              <a:rPr lang="sk-SK"/>
-              <a:t>Porovnanie s OpenCV</a:t>
-            </a:r>
-          </a:p>
-        </p:txBody>
-      </p:sp>
-      <p:sp>
-        <p:nvSpPr>
-          <p:cNvPr id="3" name="Zástupný objekt pre obsah 2">
-            <a:extLst>
-              <a:ext uri="{FF2B5EF4-FFF2-40B4-BE49-F238E27FC236}">
-                <a16:creationId xmlns:a16="http://schemas.microsoft.com/office/drawing/2014/main" id="{E2325C10-4E53-D310-8730-580066C705B9}"/>
-              </a:ext>
-            </a:extLst>
-          </p:cNvPr>
-          <p:cNvSpPr txBox="1">
-            <a:spLocks noGrp="1"/>
-          </p:cNvSpPr>
-          <p:nvPr>
-            <p:ph idx="1"/>
-          </p:nvPr>
-        </p:nvSpPr>
-        <p:spPr/>
-        <p:txBody>
-          <a:bodyPr/>
-          <a:lstStyle/>
-          <a:p>
-            <a:pPr lvl="0"/>
-            <a:r>
-              <a:rPr lang="sk-SK"/>
-              <a:t>Naša implementácia má identické výsledky ako cv2.Canny().</a:t>
-            </a:r>
-          </a:p>
-          <a:p>
-            <a:pPr lvl="0"/>
-            <a:r>
-              <a:rPr lang="sk-SK"/>
-              <a:t>Výhody vlastného riešenia:</a:t>
-            </a:r>
-          </a:p>
-          <a:p>
-            <a:pPr lvl="1"/>
-            <a:r>
-              <a:rPr lang="sk-SK"/>
-              <a:t>Možnosť detailného ladenia prahov (low, high) a hodnôt weak / strong.</a:t>
-            </a:r>
-          </a:p>
-          <a:p>
-            <a:pPr lvl="1"/>
-            <a:endParaRPr lang="sk-SK"/>
-          </a:p>
-        </p:txBody>
-      </p:sp>
-    </p:spTree>
-  </p:cSld>
-  <p:clrMapOvr>
-    <a:masterClrMapping/>
-  </p:clrMapOvr>
-</p:sld>
-</file>
-
-<file path=ppt/slides/slide14.xml><?xml version="1.0" encoding="utf-8"?>
 <p:sld xmlns:a="http://schemas.openxmlformats.org/drawingml/2006/main" xmlns:r="http://schemas.openxmlformats.org/officeDocument/2006/relationships" xmlns:p="http://schemas.openxmlformats.org/presentationml/2006/main">
   <p:cSld name="Slide15">
     <p:spTree>
@@ -5011,10 +5055,13 @@
   <p:clrMapOvr>
     <a:masterClrMapping/>
   </p:clrMapOvr>
+  <p:transition spd="med">
+    <p:pull/>
+  </p:transition>
 </p:sld>
 </file>
 
-<file path=ppt/slides/slide15.xml><?xml version="1.0" encoding="utf-8"?>
+<file path=ppt/slides/slide14.xml><?xml version="1.0" encoding="utf-8"?>
 <p:sld xmlns:a="http://schemas.openxmlformats.org/drawingml/2006/main" xmlns:r="http://schemas.openxmlformats.org/officeDocument/2006/relationships" xmlns:p="http://schemas.openxmlformats.org/presentationml/2006/main">
   <p:cSld name="Slide14">
     <p:spTree>
@@ -5101,6 +5148,150 @@
   <p:clrMapOvr>
     <a:masterClrMapping/>
   </p:clrMapOvr>
+  <p:transition spd="med">
+    <p:pull/>
+  </p:transition>
+</p:sld>
+</file>
+
+<file path=ppt/slides/slide15.xml><?xml version="1.0" encoding="utf-8"?>
+<p:sld xmlns:a="http://schemas.openxmlformats.org/drawingml/2006/main" xmlns:r="http://schemas.openxmlformats.org/officeDocument/2006/relationships" xmlns:p="http://schemas.openxmlformats.org/presentationml/2006/main">
+  <p:cSld>
+    <p:spTree>
+      <p:nvGrpSpPr>
+        <p:cNvPr id="1" name=""/>
+        <p:cNvGrpSpPr/>
+        <p:nvPr/>
+      </p:nvGrpSpPr>
+      <p:grpSpPr>
+        <a:xfrm>
+          <a:off x="0" y="0"/>
+          <a:ext cx="0" cy="0"/>
+          <a:chOff x="0" y="0"/>
+          <a:chExt cx="0" cy="0"/>
+        </a:xfrm>
+      </p:grpSpPr>
+      <p:pic>
+        <p:nvPicPr>
+          <p:cNvPr id="9" name="Zástupný objekt pre obsah 8">
+            <a:extLst>
+              <a:ext uri="{FF2B5EF4-FFF2-40B4-BE49-F238E27FC236}">
+                <a16:creationId xmlns:a16="http://schemas.microsoft.com/office/drawing/2014/main" id="{AF5DBFAC-14CF-F9E1-7A5F-3676792D1A21}"/>
+              </a:ext>
+            </a:extLst>
+          </p:cNvPr>
+          <p:cNvPicPr>
+            <a:picLocks noGrp="1" noChangeAspect="1"/>
+          </p:cNvPicPr>
+          <p:nvPr>
+            <p:ph idx="1"/>
+          </p:nvPr>
+        </p:nvPicPr>
+        <p:blipFill>
+          <a:blip r:embed="rId2">
+            <a:extLst>
+              <a:ext uri="{28A0092B-C50C-407E-A947-70E740481C1C}">
+                <a14:useLocalDpi xmlns:a14="http://schemas.microsoft.com/office/drawing/2010/main" val="0"/>
+              </a:ext>
+            </a:extLst>
+          </a:blip>
+          <a:stretch>
+            <a:fillRect/>
+          </a:stretch>
+        </p:blipFill>
+        <p:spPr>
+          <a:xfrm>
+            <a:off x="1009785" y="1071228"/>
+            <a:ext cx="10818421" cy="4715543"/>
+          </a:xfrm>
+          <a:prstGeom prst="rect">
+            <a:avLst/>
+          </a:prstGeom>
+          <a:noFill/>
+          <a:ln>
+            <a:noFill/>
+          </a:ln>
+        </p:spPr>
+      </p:pic>
+    </p:spTree>
+    <p:extLst>
+      <p:ext uri="{BB962C8B-B14F-4D97-AF65-F5344CB8AC3E}">
+        <p14:creationId xmlns:p14="http://schemas.microsoft.com/office/powerpoint/2010/main" val="3107683397"/>
+      </p:ext>
+    </p:extLst>
+  </p:cSld>
+  <p:clrMapOvr>
+    <a:masterClrMapping/>
+  </p:clrMapOvr>
+  <p:transition spd="med">
+    <p:pull/>
+  </p:transition>
+</p:sld>
+</file>
+
+<file path=ppt/slides/slide16.xml><?xml version="1.0" encoding="utf-8"?>
+<p:sld xmlns:a="http://schemas.openxmlformats.org/drawingml/2006/main" xmlns:r="http://schemas.openxmlformats.org/officeDocument/2006/relationships" xmlns:p="http://schemas.openxmlformats.org/presentationml/2006/main">
+  <p:cSld>
+    <p:spTree>
+      <p:nvGrpSpPr>
+        <p:cNvPr id="1" name=""/>
+        <p:cNvGrpSpPr/>
+        <p:nvPr/>
+      </p:nvGrpSpPr>
+      <p:grpSpPr>
+        <a:xfrm>
+          <a:off x="0" y="0"/>
+          <a:ext cx="0" cy="0"/>
+          <a:chOff x="0" y="0"/>
+          <a:chExt cx="0" cy="0"/>
+        </a:xfrm>
+      </p:grpSpPr>
+      <p:sp>
+        <p:nvSpPr>
+          <p:cNvPr id="2" name="Nadpis 1">
+            <a:extLst>
+              <a:ext uri="{FF2B5EF4-FFF2-40B4-BE49-F238E27FC236}">
+                <a16:creationId xmlns:a16="http://schemas.microsoft.com/office/drawing/2014/main" id="{2FE7D046-3C1D-B569-B455-3D3D9F376E2B}"/>
+              </a:ext>
+            </a:extLst>
+          </p:cNvPr>
+          <p:cNvSpPr>
+            <a:spLocks noGrp="1"/>
+          </p:cNvSpPr>
+          <p:nvPr>
+            <p:ph type="ctrTitle"/>
+          </p:nvPr>
+        </p:nvSpPr>
+        <p:spPr>
+          <a:xfrm>
+            <a:off x="1915386" y="2401529"/>
+            <a:ext cx="8361227" cy="2054942"/>
+          </a:xfrm>
+        </p:spPr>
+        <p:txBody>
+          <a:bodyPr/>
+          <a:lstStyle/>
+          <a:p>
+            <a:r>
+              <a:rPr lang="sk-SK" dirty="0"/>
+              <a:t>Ďakujeme za pozornosť</a:t>
+            </a:r>
+          </a:p>
+        </p:txBody>
+      </p:sp>
+    </p:spTree>
+    <p:extLst>
+      <p:ext uri="{BB962C8B-B14F-4D97-AF65-F5344CB8AC3E}">
+        <p14:creationId xmlns:p14="http://schemas.microsoft.com/office/powerpoint/2010/main" val="667070968"/>
+      </p:ext>
+    </p:extLst>
+  </p:cSld>
+  <p:clrMapOvr>
+    <a:masterClrMapping/>
+  </p:clrMapOvr>
+  <p:transition spd="med">
+    <p:pull/>
+  </p:transition>
 </p:sld>
 </file>
 
@@ -5156,6 +5347,9 @@
   <p:clrMapOvr>
     <a:masterClrMapping/>
   </p:clrMapOvr>
+  <p:transition spd="med">
+    <p:pull/>
+  </p:transition>
 </p:sld>
 </file>
 
@@ -5505,6 +5699,9 @@
   <p:clrMapOvr>
     <a:masterClrMapping/>
   </p:clrMapOvr>
+  <p:transition spd="med">
+    <p:pull/>
+  </p:transition>
 </p:sld>
 </file>
 
@@ -5560,6 +5757,9 @@
   <p:clrMapOvr>
     <a:masterClrMapping/>
   </p:clrMapOvr>
+  <p:transition spd="med">
+    <p:pull/>
+  </p:transition>
 </p:sld>
 </file>
 
@@ -5609,8 +5809,8 @@
           </a:p>
         </p:txBody>
       </p:sp>
-      <mc:AlternateContent xmlns:mc="http://schemas.openxmlformats.org/markup-compatibility/2006" xmlns:a14="http://schemas.microsoft.com/office/drawing/2010/main">
-        <mc:Choice Requires="a14">
+      <mc:AlternateContent xmlns:mc="http://schemas.openxmlformats.org/markup-compatibility/2006">
+        <mc:Choice xmlns:a14="http://schemas.microsoft.com/office/drawing/2010/main" Requires="a14">
           <p:sp>
             <p:nvSpPr>
               <p:cNvPr id="3" name="Zástupný objekt pre obsah 2">
@@ -5638,8 +5838,8 @@
                   </a:lnSpc>
                 </a:pPr>
                 <a:r>
-                  <a:rPr lang="sk-SK" sz="1900"/>
-                  <a:t>Identifikácia smeru a sily zmien intenzity</a:t>
+                  <a:rPr lang="sk-SK" sz="1900" dirty="0"/>
+                  <a:t>Identifikácia smeru a sily zmien intenzity jasu</a:t>
                 </a:r>
               </a:p>
               <a:p>
@@ -5649,7 +5849,7 @@
                   </a:lnSpc>
                 </a:pPr>
                 <a:r>
-                  <a:rPr lang="sk-SK" sz="1900"/>
+                  <a:rPr lang="sk-SK" sz="1900" dirty="0"/>
                   <a:t>Používame matice pre horizontálny a vertikálny smer:</a:t>
                 </a:r>
               </a:p>
@@ -5659,7 +5859,7 @@
                     <a:spcPct val="84000"/>
                   </a:lnSpc>
                 </a:pPr>
-                <a:endParaRPr lang="sk-SK" sz="1900"/>
+                <a:endParaRPr lang="sk-SK" sz="1900" dirty="0"/>
               </a:p>
               <a:p>
                 <a:pPr marL="0" lvl="0" indent="0">
@@ -5960,7 +6160,7 @@
                     </m:oMath>
                   </m:oMathPara>
                 </a14:m>
-                <a:endParaRPr lang="sk-SK" sz="1900"/>
+                <a:endParaRPr lang="sk-SK" sz="1900" dirty="0"/>
               </a:p>
               <a:p>
                 <a:pPr marL="0" lvl="0" indent="0">
@@ -5969,7 +6169,7 @@
                   </a:lnSpc>
                   <a:buNone/>
                 </a:pPr>
-                <a:endParaRPr lang="sk-SK" sz="1900"/>
+                <a:endParaRPr lang="sk-SK" sz="1900" dirty="0"/>
               </a:p>
               <a:p>
                 <a:pPr lvl="0">
@@ -5978,7 +6178,7 @@
                   </a:lnSpc>
                 </a:pPr>
                 <a:r>
-                  <a:rPr lang="sk-SK" sz="1900"/>
+                  <a:rPr lang="sk-SK" sz="1900" dirty="0"/>
                   <a:t>Výpočet parciálnych derivácií:</a:t>
                 </a:r>
               </a:p>
@@ -6061,7 +6261,7 @@
                   </m:oMath>
                 </a14:m>
                 <a:r>
-                  <a:rPr lang="sk-SK" sz="1900"/>
+                  <a:rPr lang="sk-SK" sz="1900" dirty="0"/>
                   <a:t> </a:t>
                 </a:r>
               </a:p>
@@ -6143,12 +6343,12 @@
                     </m:sSub>
                   </m:oMath>
                 </a14:m>
-                <a:endParaRPr lang="sk-SK" sz="1900"/>
+                <a:endParaRPr lang="sk-SK" sz="1900" dirty="0"/>
               </a:p>
             </p:txBody>
           </p:sp>
         </mc:Choice>
-        <mc:Fallback xmlns="">
+        <mc:Fallback>
           <p:sp>
             <p:nvSpPr>
               <p:cNvPr id="3" name="Zástupný objekt pre obsah 2">
@@ -6193,6 +6393,9 @@
   <p:clrMapOvr>
     <a:masterClrMapping/>
   </p:clrMapOvr>
+  <p:transition spd="med">
+    <p:pull/>
+  </p:transition>
 </p:sld>
 </file>
 
@@ -6242,8 +6445,8 @@
           </a:p>
         </p:txBody>
       </p:sp>
-      <mc:AlternateContent xmlns:mc="http://schemas.openxmlformats.org/markup-compatibility/2006" xmlns:a14="http://schemas.microsoft.com/office/drawing/2010/main">
-        <mc:Choice Requires="a14">
+      <mc:AlternateContent xmlns:mc="http://schemas.openxmlformats.org/markup-compatibility/2006">
+        <mc:Choice xmlns:a14="http://schemas.microsoft.com/office/drawing/2010/main" Requires="a14">
           <p:sp>
             <p:nvSpPr>
               <p:cNvPr id="3" name="Zástupný objekt pre obsah 2">
@@ -6260,42 +6463,52 @@
                 <p:ph idx="1"/>
               </p:nvPr>
             </p:nvSpPr>
-            <p:spPr/>
+            <p:spPr>
+              <a:xfrm>
+                <a:off x="1371600" y="1676396"/>
+                <a:ext cx="9601200" cy="4495804"/>
+              </a:xfrm>
+            </p:spPr>
             <p:txBody>
-              <a:bodyPr/>
+              <a:bodyPr>
+                <a:normAutofit/>
+              </a:bodyPr>
               <a:lstStyle/>
               <a:p>
                 <a:pPr lvl="0">
                   <a:lnSpc>
-                    <a:spcPct val="64000"/>
+                    <a:spcPct val="100000"/>
                   </a:lnSpc>
                 </a:pPr>
                 <a:r>
-                  <a:rPr lang="sk-SK"/>
-                  <a:t>Cieľ: Spojiť informácie z oboch smerov do jedného výsledku</a:t>
+                  <a:rPr lang="sk-SK" dirty="0"/>
+                  <a:t>Spojiť informácie z oboch do jedného výsledku</a:t>
                 </a:r>
               </a:p>
               <a:p>
                 <a:pPr lvl="0">
                   <a:lnSpc>
-                    <a:spcPct val="64000"/>
+                    <a:spcPct val="100000"/>
                   </a:lnSpc>
                 </a:pPr>
                 <a:r>
-                  <a:rPr lang="sk-SK"/>
+                  <a:rPr lang="sk-SK" dirty="0"/>
                   <a:t>Celková veľkosť: Vypočítaná v kóde ako euklidovská vzdialenosť:</a:t>
                 </a:r>
               </a:p>
               <a:p>
                 <a:pPr lvl="0">
                   <a:lnSpc>
-                    <a:spcPct val="64000"/>
+                    <a:spcPct val="100000"/>
                   </a:lnSpc>
                 </a:pPr>
-                <a:endParaRPr lang="sk-SK"/>
+                <a:endParaRPr lang="sk-SK" dirty="0"/>
               </a:p>
               <a:p>
                 <a:pPr marL="0" lvl="0" indent="0">
+                  <a:lnSpc>
+                    <a:spcPct val="100000"/>
+                  </a:lnSpc>
                   <a:buNone/>
                 </a:pPr>
                 <a14:m>
@@ -6423,29 +6636,32 @@
                     </m:oMath>
                   </m:oMathPara>
                 </a14:m>
-                <a:endParaRPr lang="sk-SK"/>
+                <a:endParaRPr lang="sk-SK" dirty="0"/>
               </a:p>
               <a:p>
                 <a:pPr lvl="0">
                   <a:lnSpc>
-                    <a:spcPct val="64000"/>
+                    <a:spcPct val="100000"/>
                   </a:lnSpc>
                 </a:pPr>
                 <a:r>
-                  <a:rPr lang="sk-SK"/>
+                  <a:rPr lang="sk-SK" dirty="0"/>
                   <a:t>Smer hrany: Určuje, ktorým smerom sa jas mení najprudšie:</a:t>
                 </a:r>
               </a:p>
               <a:p>
                 <a:pPr lvl="0">
                   <a:lnSpc>
-                    <a:spcPct val="64000"/>
+                    <a:spcPct val="100000"/>
                   </a:lnSpc>
                 </a:pPr>
-                <a:endParaRPr lang="sk-SK"/>
+                <a:endParaRPr lang="sk-SK" dirty="0"/>
               </a:p>
               <a:p>
                 <a:pPr marL="0" lvl="0" indent="0">
+                  <a:lnSpc>
+                    <a:spcPct val="100000"/>
+                  </a:lnSpc>
                   <a:buNone/>
                 </a:pPr>
                 <a14:m>
@@ -6584,17 +6800,33 @@
                     </m:oMath>
                   </m:oMathPara>
                 </a14:m>
-                <a:endParaRPr lang="sk-SK"/>
+                <a:endParaRPr lang="sk-SK" dirty="0"/>
               </a:p>
               <a:p>
                 <a:pPr lvl="0">
                   <a:lnSpc>
-                    <a:spcPct val="64000"/>
+                    <a:spcPct val="100000"/>
                   </a:lnSpc>
                 </a:pPr>
                 <a:r>
-                  <a:rPr lang="sk-SK"/>
-                  <a:t>Smer hrany je kľúčový pre ďalší krok (Non-maximum suppression), kde sa hrany stenčujú práve v smere </a:t>
+                  <a:rPr lang="sk-SK" dirty="0"/>
+                  <a:t>Smer hrany je kľúčový pre </a:t>
+                </a:r>
+                <a:r>
+                  <a:rPr lang="sk-SK" dirty="0" err="1"/>
+                  <a:t>Non</a:t>
+                </a:r>
+                <a:r>
+                  <a:rPr lang="sk-SK" dirty="0"/>
+                  <a:t>-maximum </a:t>
+                </a:r>
+                <a:r>
+                  <a:rPr lang="sk-SK" dirty="0" err="1"/>
+                  <a:t>suppression</a:t>
+                </a:r>
+                <a:r>
+                  <a:rPr lang="sk-SK" dirty="0"/>
+                  <a:t>, kde sa hrany stenčujú práve v smere </a:t>
                 </a:r>
                 <a14:m>
                   <m:oMath xmlns:m="http://schemas.openxmlformats.org/officeDocument/2006/math">
@@ -6606,10 +6838,7 @@
                     </m:r>
                   </m:oMath>
                 </a14:m>
-                <a:r>
-                  <a:rPr lang="sk-SK"/>
-                  <a:t>.</a:t>
-                </a:r>
+                <a:endParaRPr lang="sk-SK" dirty="0"/>
               </a:p>
               <a:p>
                 <a:pPr marL="0" lvl="0" indent="0">
@@ -6618,12 +6847,12 @@
                   </a:lnSpc>
                   <a:buNone/>
                 </a:pPr>
-                <a:endParaRPr lang="sk-SK"/>
+                <a:endParaRPr lang="sk-SK" dirty="0"/>
               </a:p>
             </p:txBody>
           </p:sp>
         </mc:Choice>
-        <mc:Fallback xmlns="">
+        <mc:Fallback>
           <p:sp>
             <p:nvSpPr>
               <p:cNvPr id="3" name="Zástupný objekt pre obsah 2">
@@ -6641,10 +6870,14 @@
               </p:nvPr>
             </p:nvSpPr>
             <p:spPr>
+              <a:xfrm>
+                <a:off x="1371600" y="1676396"/>
+                <a:ext cx="9601200" cy="4495804"/>
+              </a:xfrm>
               <a:blipFill>
                 <a:blip r:embed="rId2"/>
                 <a:stretch>
-                  <a:fillRect l="-571" t="-3571" b="-1020"/>
+                  <a:fillRect l="-571" t="-678"/>
                 </a:stretch>
               </a:blipFill>
             </p:spPr>
@@ -6668,6 +6901,9 @@
   <p:clrMapOvr>
     <a:masterClrMapping/>
   </p:clrMapOvr>
+  <p:transition spd="med">
+    <p:pull/>
+  </p:transition>
 </p:sld>
 </file>
 
@@ -6723,6 +6959,9 @@
   <p:clrMapOvr>
     <a:masterClrMapping/>
   </p:clrMapOvr>
+  <p:transition spd="med">
+    <p:pull/>
+  </p:transition>
 </p:sld>
 </file>
 
@@ -6759,16 +6998,30 @@
             <p:ph type="title"/>
           </p:nvPr>
         </p:nvSpPr>
-        <p:spPr/>
+        <p:spPr>
+          <a:xfrm>
+            <a:off x="1371600" y="990597"/>
+            <a:ext cx="9601200" cy="1036323"/>
+          </a:xfrm>
+        </p:spPr>
         <p:txBody>
           <a:bodyPr/>
           <a:lstStyle/>
           <a:p>
             <a:pPr lvl="0"/>
             <a:r>
-              <a:rPr lang="sk-SK"/>
-              <a:t>Non-Maximum Suppresion</a:t>
-            </a:r>
+              <a:rPr lang="sk-SK" dirty="0" err="1"/>
+              <a:t>Non</a:t>
+            </a:r>
+            <a:r>
+              <a:rPr lang="sk-SK" dirty="0"/>
+              <a:t>-Maximum </a:t>
+            </a:r>
+            <a:r>
+              <a:rPr lang="sk-SK" dirty="0" err="1"/>
+              <a:t>Suppresion</a:t>
+            </a:r>
+            <a:endParaRPr lang="sk-SK" dirty="0"/>
           </a:p>
         </p:txBody>
       </p:sp>
@@ -6793,38 +7046,70 @@
           <a:bodyPr/>
           <a:lstStyle/>
           <a:p>
-            <a:pPr lvl="0"/>
-            <a:r>
-              <a:rPr lang="sk-SK"/>
-              <a:t>Cieľ: Stenšenie rozmazaných hrán z predchádzajúceho kroku na šírku 1 pixelu.</a:t>
-            </a:r>
-          </a:p>
-          <a:p>
-            <a:pPr lvl="0"/>
-            <a:r>
-              <a:rPr lang="sk-SK"/>
-              <a:t>Princíp: Pre každý pixel sa kontroluje, či je jeho magnitúda najväčšia v smere jeho gradientu.</a:t>
-            </a:r>
-          </a:p>
-          <a:p>
-            <a:pPr lvl="0"/>
-            <a:r>
-              <a:rPr lang="sk-SK"/>
-              <a:t>Kategorizácia smerov v kóde: Uhly sme rozdelili do 4 sektorov:</a:t>
-            </a:r>
-          </a:p>
-          <a:p>
-            <a:pPr lvl="1"/>
-            <a:r>
-              <a:rPr lang="sk-SK"/>
+            <a:pPr lvl="0">
+              <a:lnSpc>
+                <a:spcPct val="150000"/>
+              </a:lnSpc>
+            </a:pPr>
+            <a:r>
+              <a:rPr lang="sk-SK" dirty="0" err="1"/>
+              <a:t>Stenšenie</a:t>
+            </a:r>
+            <a:r>
+              <a:rPr lang="sk-SK" dirty="0"/>
+              <a:t> rozmazaných hrán na šírku 1 pixelu</a:t>
+            </a:r>
+          </a:p>
+          <a:p>
+            <a:pPr lvl="0">
+              <a:lnSpc>
+                <a:spcPct val="150000"/>
+              </a:lnSpc>
+            </a:pPr>
+            <a:r>
+              <a:rPr lang="sk-SK" dirty="0"/>
+              <a:t>Pre každý pixel sa kontroluje, či je jeho </a:t>
+            </a:r>
+            <a:r>
+              <a:rPr lang="sk-SK" dirty="0" err="1"/>
+              <a:t>magnitúda</a:t>
+            </a:r>
+            <a:r>
+              <a:rPr lang="sk-SK" dirty="0"/>
+              <a:t> najväčšia v smere jeho gradientu</a:t>
+            </a:r>
+          </a:p>
+          <a:p>
+            <a:pPr lvl="0">
+              <a:lnSpc>
+                <a:spcPct val="150000"/>
+              </a:lnSpc>
+            </a:pPr>
+            <a:r>
+              <a:rPr lang="sk-SK" dirty="0"/>
+              <a:t>Kategorizácia smerov, uhly sme rozdelili do 4 sektorov:</a:t>
+            </a:r>
+          </a:p>
+          <a:p>
+            <a:pPr lvl="1">
+              <a:lnSpc>
+                <a:spcPct val="150000"/>
+              </a:lnSpc>
+            </a:pPr>
+            <a:r>
+              <a:rPr lang="sk-SK" dirty="0"/>
               <a:t>0°, 45°, 90° a 135°</a:t>
             </a:r>
           </a:p>
           <a:p>
-            <a:pPr lvl="0"/>
-            <a:r>
-              <a:rPr lang="sk-SK"/>
-              <a:t>Ak pixel nie je lokálnym maximom, jeho hodnota sa nastaví na 0.</a:t>
+            <a:pPr lvl="0">
+              <a:lnSpc>
+                <a:spcPct val="150000"/>
+              </a:lnSpc>
+            </a:pPr>
+            <a:r>
+              <a:rPr lang="sk-SK" dirty="0"/>
+              <a:t>Ak pixel nie je lokálnym maximom, jeho hodnota sa nastaví na 0</a:t>
             </a:r>
           </a:p>
         </p:txBody>
@@ -6834,6 +7119,9 @@
   <p:clrMapOvr>
     <a:masterClrMapping/>
   </p:clrMapOvr>
+  <p:transition spd="med">
+    <p:pull/>
+  </p:transition>
 </p:sld>
 </file>
 
@@ -6889,6 +7177,9 @@
   <p:clrMapOvr>
     <a:masterClrMapping/>
   </p:clrMapOvr>
+  <p:transition spd="med">
+    <p:pull/>
+  </p:transition>
 </p:sld>
 </file>
 
